--- a/その他/進路ガイダンス.pptx
+++ b/その他/進路ガイダンス.pptx
@@ -272,7 +272,7 @@
           <a:p>
             <a:fld id="{E9CC885B-4903-4D54-9A93-00025F12DED9}" type="datetimeFigureOut">
               <a:rPr kumimoji="1" lang="ja-JP" altLang="en-US" smtClean="0"/>
-              <a:t>2026/8/24</a:t>
+              <a:t>2026/9/17</a:t>
             </a:fld>
             <a:endParaRPr kumimoji="1" lang="ja-JP" altLang="en-US"/>
           </a:p>
@@ -502,7 +502,7 @@
           <a:p>
             <a:fld id="{E9CC885B-4903-4D54-9A93-00025F12DED9}" type="datetimeFigureOut">
               <a:rPr kumimoji="1" lang="ja-JP" altLang="en-US" smtClean="0"/>
-              <a:t>2026/8/24</a:t>
+              <a:t>2026/9/17</a:t>
             </a:fld>
             <a:endParaRPr kumimoji="1" lang="ja-JP" altLang="en-US"/>
           </a:p>
@@ -742,7 +742,7 @@
           <a:p>
             <a:fld id="{E9CC885B-4903-4D54-9A93-00025F12DED9}" type="datetimeFigureOut">
               <a:rPr kumimoji="1" lang="ja-JP" altLang="en-US" smtClean="0"/>
-              <a:t>2026/8/24</a:t>
+              <a:t>2026/9/17</a:t>
             </a:fld>
             <a:endParaRPr kumimoji="1" lang="ja-JP" altLang="en-US"/>
           </a:p>
@@ -972,7 +972,7 @@
           <a:p>
             <a:fld id="{E9CC885B-4903-4D54-9A93-00025F12DED9}" type="datetimeFigureOut">
               <a:rPr kumimoji="1" lang="ja-JP" altLang="en-US" smtClean="0"/>
-              <a:t>2026/8/24</a:t>
+              <a:t>2026/9/17</a:t>
             </a:fld>
             <a:endParaRPr kumimoji="1" lang="ja-JP" altLang="en-US"/>
           </a:p>
@@ -1247,7 +1247,7 @@
           <a:p>
             <a:fld id="{E9CC885B-4903-4D54-9A93-00025F12DED9}" type="datetimeFigureOut">
               <a:rPr kumimoji="1" lang="ja-JP" altLang="en-US" smtClean="0"/>
-              <a:t>2026/8/24</a:t>
+              <a:t>2026/9/17</a:t>
             </a:fld>
             <a:endParaRPr kumimoji="1" lang="ja-JP" altLang="en-US"/>
           </a:p>
@@ -1576,7 +1576,7 @@
           <a:p>
             <a:fld id="{E9CC885B-4903-4D54-9A93-00025F12DED9}" type="datetimeFigureOut">
               <a:rPr kumimoji="1" lang="ja-JP" altLang="en-US" smtClean="0"/>
-              <a:t>2026/8/24</a:t>
+              <a:t>2026/9/17</a:t>
             </a:fld>
             <a:endParaRPr kumimoji="1" lang="ja-JP" altLang="en-US"/>
           </a:p>
@@ -2052,7 +2052,7 @@
           <a:p>
             <a:fld id="{E9CC885B-4903-4D54-9A93-00025F12DED9}" type="datetimeFigureOut">
               <a:rPr kumimoji="1" lang="ja-JP" altLang="en-US" smtClean="0"/>
-              <a:t>2026/8/24</a:t>
+              <a:t>2026/9/17</a:t>
             </a:fld>
             <a:endParaRPr kumimoji="1" lang="ja-JP" altLang="en-US"/>
           </a:p>
@@ -2193,7 +2193,7 @@
           <a:p>
             <a:fld id="{E9CC885B-4903-4D54-9A93-00025F12DED9}" type="datetimeFigureOut">
               <a:rPr kumimoji="1" lang="ja-JP" altLang="en-US" smtClean="0"/>
-              <a:t>2026/8/24</a:t>
+              <a:t>2026/9/17</a:t>
             </a:fld>
             <a:endParaRPr kumimoji="1" lang="ja-JP" altLang="en-US"/>
           </a:p>
@@ -2306,7 +2306,7 @@
           <a:p>
             <a:fld id="{E9CC885B-4903-4D54-9A93-00025F12DED9}" type="datetimeFigureOut">
               <a:rPr kumimoji="1" lang="ja-JP" altLang="en-US" smtClean="0"/>
-              <a:t>2026/8/24</a:t>
+              <a:t>2026/9/17</a:t>
             </a:fld>
             <a:endParaRPr kumimoji="1" lang="ja-JP" altLang="en-US"/>
           </a:p>
@@ -2649,7 +2649,7 @@
           <a:p>
             <a:fld id="{E9CC885B-4903-4D54-9A93-00025F12DED9}" type="datetimeFigureOut">
               <a:rPr kumimoji="1" lang="ja-JP" altLang="en-US" smtClean="0"/>
-              <a:t>2026/8/24</a:t>
+              <a:t>2026/9/17</a:t>
             </a:fld>
             <a:endParaRPr kumimoji="1" lang="ja-JP" altLang="en-US"/>
           </a:p>
@@ -2937,7 +2937,7 @@
           <a:p>
             <a:fld id="{E9CC885B-4903-4D54-9A93-00025F12DED9}" type="datetimeFigureOut">
               <a:rPr kumimoji="1" lang="ja-JP" altLang="en-US" smtClean="0"/>
-              <a:t>2026/8/24</a:t>
+              <a:t>2026/9/17</a:t>
             </a:fld>
             <a:endParaRPr kumimoji="1" lang="ja-JP" altLang="en-US"/>
           </a:p>
@@ -3210,7 +3210,7 @@
           <a:p>
             <a:fld id="{E9CC885B-4903-4D54-9A93-00025F12DED9}" type="datetimeFigureOut">
               <a:rPr kumimoji="1" lang="ja-JP" altLang="en-US" smtClean="0"/>
-              <a:t>2026/8/24</a:t>
+              <a:t>2026/9/17</a:t>
             </a:fld>
             <a:endParaRPr kumimoji="1" lang="ja-JP" altLang="en-US"/>
           </a:p>
@@ -5582,7 +5582,7 @@
         <p:spPr>
           <a:xfrm>
             <a:off x="567542" y="1216429"/>
-            <a:ext cx="9110186" cy="4154984"/>
+            <a:ext cx="9417963" cy="4154984"/>
           </a:xfrm>
           <a:prstGeom prst="rect">
             <a:avLst/>
@@ -5597,7 +5597,15 @@
           <a:p>
             <a:r>
               <a:rPr lang="ja-JP" altLang="en-US" sz="2400" dirty="0"/>
-              <a:t>ゲームクリエイター科を卒業した後の就職について考えましょう</a:t>
+              <a:t>ゲームクリエイター科を卒業した</a:t>
+            </a:r>
+            <a:r>
+              <a:rPr lang="ja-JP" altLang="en-US" sz="2400"/>
+              <a:t>後の進路について</a:t>
+            </a:r>
+            <a:r>
+              <a:rPr lang="ja-JP" altLang="en-US" sz="2400" dirty="0"/>
+              <a:t>考えましょう</a:t>
             </a:r>
             <a:endParaRPr lang="en-US" altLang="ja-JP" sz="2400" dirty="0"/>
           </a:p>
